--- a/docs/Lectures/Week09/Lab_summary.pptx
+++ b/docs/Lectures/Week09/Lab_summary.pptx
@@ -5,12 +5,11 @@
     <p:sldMasterId id="2147483648" r:id="rId1"/>
   </p:sldMasterIdLst>
   <p:sldIdLst>
-    <p:sldId id="256" r:id="rId2"/>
-    <p:sldId id="257" r:id="rId3"/>
-    <p:sldId id="258" r:id="rId4"/>
-    <p:sldId id="260" r:id="rId5"/>
-    <p:sldId id="259" r:id="rId6"/>
-    <p:sldId id="261" r:id="rId7"/>
+    <p:sldId id="257" r:id="rId2"/>
+    <p:sldId id="258" r:id="rId3"/>
+    <p:sldId id="260" r:id="rId4"/>
+    <p:sldId id="259" r:id="rId5"/>
+    <p:sldId id="261" r:id="rId6"/>
   </p:sldIdLst>
   <p:sldSz cx="12192000" cy="6858000"/>
   <p:notesSz cx="6858000" cy="9144000"/>
@@ -109,6 +108,11 @@
       </a:defRPr>
     </a:lvl9pPr>
   </p:defaultTextStyle>
+  <p:extLst>
+    <p:ext uri="{EFAFB233-063F-42B5-8137-9DF3F51BA10A}">
+      <p15:sldGuideLst xmlns:p15="http://schemas.microsoft.com/office/powerpoint/2012/main"/>
+    </p:ext>
+  </p:extLst>
 </p:presentation>
 </file>
 
@@ -261,7 +265,7 @@
           <a:p>
             <a:fld id="{C2F18B6C-843B-406C-935A-B3536A549CC8}" type="datetimeFigureOut">
               <a:rPr lang="zh-CN" altLang="en-US" smtClean="0"/>
-              <a:t>2026/3/1</a:t>
+              <a:t>2026/3/5</a:t>
             </a:fld>
             <a:endParaRPr lang="zh-CN" altLang="en-US"/>
           </a:p>
@@ -461,7 +465,7 @@
           <a:p>
             <a:fld id="{C2F18B6C-843B-406C-935A-B3536A549CC8}" type="datetimeFigureOut">
               <a:rPr lang="zh-CN" altLang="en-US" smtClean="0"/>
-              <a:t>2026/3/1</a:t>
+              <a:t>2026/3/5</a:t>
             </a:fld>
             <a:endParaRPr lang="zh-CN" altLang="en-US"/>
           </a:p>
@@ -671,7 +675,7 @@
           <a:p>
             <a:fld id="{C2F18B6C-843B-406C-935A-B3536A549CC8}" type="datetimeFigureOut">
               <a:rPr lang="zh-CN" altLang="en-US" smtClean="0"/>
-              <a:t>2026/3/1</a:t>
+              <a:t>2026/3/5</a:t>
             </a:fld>
             <a:endParaRPr lang="zh-CN" altLang="en-US"/>
           </a:p>
@@ -871,7 +875,7 @@
           <a:p>
             <a:fld id="{C2F18B6C-843B-406C-935A-B3536A549CC8}" type="datetimeFigureOut">
               <a:rPr lang="zh-CN" altLang="en-US" smtClean="0"/>
-              <a:t>2026/3/1</a:t>
+              <a:t>2026/3/5</a:t>
             </a:fld>
             <a:endParaRPr lang="zh-CN" altLang="en-US"/>
           </a:p>
@@ -1147,7 +1151,7 @@
           <a:p>
             <a:fld id="{C2F18B6C-843B-406C-935A-B3536A549CC8}" type="datetimeFigureOut">
               <a:rPr lang="zh-CN" altLang="en-US" smtClean="0"/>
-              <a:t>2026/3/1</a:t>
+              <a:t>2026/3/5</a:t>
             </a:fld>
             <a:endParaRPr lang="zh-CN" altLang="en-US"/>
           </a:p>
@@ -1415,7 +1419,7 @@
           <a:p>
             <a:fld id="{C2F18B6C-843B-406C-935A-B3536A549CC8}" type="datetimeFigureOut">
               <a:rPr lang="zh-CN" altLang="en-US" smtClean="0"/>
-              <a:t>2026/3/1</a:t>
+              <a:t>2026/3/5</a:t>
             </a:fld>
             <a:endParaRPr lang="zh-CN" altLang="en-US"/>
           </a:p>
@@ -1830,7 +1834,7 @@
           <a:p>
             <a:fld id="{C2F18B6C-843B-406C-935A-B3536A549CC8}" type="datetimeFigureOut">
               <a:rPr lang="zh-CN" altLang="en-US" smtClean="0"/>
-              <a:t>2026/3/1</a:t>
+              <a:t>2026/3/5</a:t>
             </a:fld>
             <a:endParaRPr lang="zh-CN" altLang="en-US"/>
           </a:p>
@@ -1972,7 +1976,7 @@
           <a:p>
             <a:fld id="{C2F18B6C-843B-406C-935A-B3536A549CC8}" type="datetimeFigureOut">
               <a:rPr lang="zh-CN" altLang="en-US" smtClean="0"/>
-              <a:t>2026/3/1</a:t>
+              <a:t>2026/3/5</a:t>
             </a:fld>
             <a:endParaRPr lang="zh-CN" altLang="en-US"/>
           </a:p>
@@ -2085,7 +2089,7 @@
           <a:p>
             <a:fld id="{C2F18B6C-843B-406C-935A-B3536A549CC8}" type="datetimeFigureOut">
               <a:rPr lang="zh-CN" altLang="en-US" smtClean="0"/>
-              <a:t>2026/3/1</a:t>
+              <a:t>2026/3/5</a:t>
             </a:fld>
             <a:endParaRPr lang="zh-CN" altLang="en-US"/>
           </a:p>
@@ -2398,7 +2402,7 @@
           <a:p>
             <a:fld id="{C2F18B6C-843B-406C-935A-B3536A549CC8}" type="datetimeFigureOut">
               <a:rPr lang="zh-CN" altLang="en-US" smtClean="0"/>
-              <a:t>2026/3/1</a:t>
+              <a:t>2026/3/5</a:t>
             </a:fld>
             <a:endParaRPr lang="zh-CN" altLang="en-US"/>
           </a:p>
@@ -2687,7 +2691,7 @@
           <a:p>
             <a:fld id="{C2F18B6C-843B-406C-935A-B3536A549CC8}" type="datetimeFigureOut">
               <a:rPr lang="zh-CN" altLang="en-US" smtClean="0"/>
-              <a:t>2026/3/1</a:t>
+              <a:t>2026/3/5</a:t>
             </a:fld>
             <a:endParaRPr lang="zh-CN" altLang="en-US"/>
           </a:p>
@@ -2930,7 +2934,7 @@
           <a:p>
             <a:fld id="{C2F18B6C-843B-406C-935A-B3536A549CC8}" type="datetimeFigureOut">
               <a:rPr lang="zh-CN" altLang="en-US" smtClean="0"/>
-              <a:t>2026/3/1</a:t>
+              <a:t>2026/3/5</a:t>
             </a:fld>
             <a:endParaRPr lang="zh-CN" altLang="en-US"/>
           </a:p>
@@ -3352,15 +3356,15 @@
           <p:cNvPr id="2" name="Title 1">
             <a:extLst>
               <a:ext uri="{FF2B5EF4-FFF2-40B4-BE49-F238E27FC236}">
-                <a16:creationId xmlns:a16="http://schemas.microsoft.com/office/drawing/2014/main" id="{47B4BC97-7030-96A6-9AFD-D6C37B11FE32}"/>
-              </a:ext>
-            </a:extLst>
-          </p:cNvPr>
-          <p:cNvSpPr>
-            <a:spLocks noGrp="1"/>
-          </p:cNvSpPr>
-          <p:nvPr>
-            <p:ph type="ctrTitle"/>
+                <a16:creationId xmlns:a16="http://schemas.microsoft.com/office/drawing/2014/main" id="{6B99E9E2-D36A-64D4-EA0D-4B1FF40EE3F0}"/>
+              </a:ext>
+            </a:extLst>
+          </p:cNvPr>
+          <p:cNvSpPr>
+            <a:spLocks noGrp="1"/>
+          </p:cNvSpPr>
+          <p:nvPr>
+            <p:ph type="title"/>
           </p:nvPr>
         </p:nvSpPr>
         <p:spPr/>
@@ -3368,48 +3372,29 @@
           <a:bodyPr/>
           <a:lstStyle/>
           <a:p>
-            <a:endParaRPr lang="zh-CN" altLang="en-US"/>
-          </a:p>
-        </p:txBody>
-      </p:sp>
-      <p:sp>
-        <p:nvSpPr>
-          <p:cNvPr id="3" name="Subtitle 2">
-            <a:extLst>
-              <a:ext uri="{FF2B5EF4-FFF2-40B4-BE49-F238E27FC236}">
-                <a16:creationId xmlns:a16="http://schemas.microsoft.com/office/drawing/2014/main" id="{A2F32F70-3342-A1F7-D5AC-A541116433E6}"/>
-              </a:ext>
-            </a:extLst>
-          </p:cNvPr>
-          <p:cNvSpPr>
-            <a:spLocks noGrp="1"/>
-          </p:cNvSpPr>
-          <p:nvPr>
-            <p:ph type="subTitle" idx="1"/>
-          </p:nvPr>
-        </p:nvSpPr>
-        <p:spPr/>
-        <p:txBody>
-          <a:bodyPr/>
-          <a:lstStyle/>
-          <a:p>
-            <a:endParaRPr lang="zh-CN" altLang="en-US"/>
+            <a:r>
+              <a:rPr lang="en-US" altLang="zh-CN" dirty="0"/>
+              <a:t>Lab 04</a:t>
+            </a:r>
+            <a:endParaRPr lang="zh-CN" altLang="en-US" dirty="0"/>
           </a:p>
         </p:txBody>
       </p:sp>
       <p:pic>
         <p:nvPicPr>
-          <p:cNvPr id="5" name="Picture 4">
-            <a:extLst>
-              <a:ext uri="{FF2B5EF4-FFF2-40B4-BE49-F238E27FC236}">
-                <a16:creationId xmlns:a16="http://schemas.microsoft.com/office/drawing/2014/main" id="{72B53872-A760-1A80-E9AA-74CCA48C521D}"/>
+          <p:cNvPr id="5" name="Content Placeholder 4">
+            <a:extLst>
+              <a:ext uri="{FF2B5EF4-FFF2-40B4-BE49-F238E27FC236}">
+                <a16:creationId xmlns:a16="http://schemas.microsoft.com/office/drawing/2014/main" id="{39634A23-2957-92BB-5FD1-ADBE29286297}"/>
               </a:ext>
             </a:extLst>
           </p:cNvPr>
           <p:cNvPicPr>
-            <a:picLocks noChangeAspect="1"/>
+            <a:picLocks noGrp="1" noChangeAspect="1"/>
           </p:cNvPicPr>
-          <p:nvPr/>
+          <p:nvPr>
+            <p:ph idx="1"/>
+          </p:nvPr>
         </p:nvPicPr>
         <p:blipFill>
           <a:blip r:embed="rId2"/>
@@ -3419,18 +3404,150 @@
         </p:blipFill>
         <p:spPr>
           <a:xfrm>
-            <a:off x="510286" y="2995666"/>
-            <a:ext cx="11171428" cy="866667"/>
+            <a:off x="693821" y="1350713"/>
+            <a:ext cx="10515600" cy="815788"/>
           </a:xfrm>
           <a:prstGeom prst="rect">
             <a:avLst/>
           </a:prstGeom>
         </p:spPr>
       </p:pic>
+      <p:pic>
+        <p:nvPicPr>
+          <p:cNvPr id="7" name="Picture 6">
+            <a:extLst>
+              <a:ext uri="{FF2B5EF4-FFF2-40B4-BE49-F238E27FC236}">
+                <a16:creationId xmlns:a16="http://schemas.microsoft.com/office/drawing/2014/main" id="{EB1D6F33-DC48-CC35-6101-A54B2F7E619E}"/>
+              </a:ext>
+            </a:extLst>
+          </p:cNvPr>
+          <p:cNvPicPr>
+            <a:picLocks noChangeAspect="1"/>
+          </p:cNvPicPr>
+          <p:nvPr/>
+        </p:nvPicPr>
+        <p:blipFill>
+          <a:blip r:embed="rId3"/>
+          <a:stretch>
+            <a:fillRect/>
+          </a:stretch>
+        </p:blipFill>
+        <p:spPr>
+          <a:xfrm>
+            <a:off x="7694648" y="2676276"/>
+            <a:ext cx="2600000" cy="3628571"/>
+          </a:xfrm>
+          <a:prstGeom prst="rect">
+            <a:avLst/>
+          </a:prstGeom>
+        </p:spPr>
+      </p:pic>
+      <p:sp>
+        <p:nvSpPr>
+          <p:cNvPr id="9" name="TextBox 8">
+            <a:extLst>
+              <a:ext uri="{FF2B5EF4-FFF2-40B4-BE49-F238E27FC236}">
+                <a16:creationId xmlns:a16="http://schemas.microsoft.com/office/drawing/2014/main" id="{82533DFF-594F-F4A9-706B-B388009F4136}"/>
+              </a:ext>
+            </a:extLst>
+          </p:cNvPr>
+          <p:cNvSpPr txBox="1"/>
+          <p:nvPr/>
+        </p:nvSpPr>
+        <p:spPr>
+          <a:xfrm>
+            <a:off x="916686" y="2676276"/>
+            <a:ext cx="6094476" cy="646331"/>
+          </a:xfrm>
+          <a:prstGeom prst="rect">
+            <a:avLst/>
+          </a:prstGeom>
+          <a:noFill/>
+        </p:spPr>
+        <p:txBody>
+          <a:bodyPr wrap="square">
+            <a:spAutoFit/>
+          </a:bodyPr>
+          <a:lstStyle/>
+          <a:p>
+            <a:pPr>
+              <a:buNone/>
+            </a:pPr>
+            <a:r>
+              <a:rPr lang="en-US" altLang="zh-CN" dirty="0">
+                <a:solidFill>
+                  <a:srgbClr val="C00000"/>
+                </a:solidFill>
+                <a:latin typeface="Verdana" panose="020B0604030504040204" pitchFamily="34" charset="0"/>
+                <a:ea typeface="SimSun" panose="02010600030101010101" pitchFamily="2" charset="-122"/>
+                <a:cs typeface="Times New Roman" panose="02020603050405020304" pitchFamily="18" charset="0"/>
+              </a:rPr>
+              <a:t>Answer: </a:t>
+            </a:r>
+            <a:r>
+              <a:rPr lang="en-US" altLang="zh-CN" sz="1800" dirty="0">
+                <a:solidFill>
+                  <a:srgbClr val="C00000"/>
+                </a:solidFill>
+                <a:effectLst/>
+                <a:latin typeface="Verdana" panose="020B0604030504040204" pitchFamily="34" charset="0"/>
+                <a:ea typeface="SimSun" panose="02010600030101010101" pitchFamily="2" charset="-122"/>
+                <a:cs typeface="Times New Roman" panose="02020603050405020304" pitchFamily="18" charset="0"/>
+              </a:rPr>
+              <a:t>1984: </a:t>
+            </a:r>
+            <a:r>
+              <a:rPr lang="en-US" altLang="zh-CN" sz="1800" dirty="0">
+                <a:solidFill>
+                  <a:srgbClr val="C00000"/>
+                </a:solidFill>
+                <a:effectLst/>
+                <a:latin typeface="Verdana" panose="020B0604030504040204" pitchFamily="34" charset="0"/>
+                <a:ea typeface="Times New Roman" panose="02020603050405020304" pitchFamily="18" charset="0"/>
+                <a:cs typeface="Times New Roman" panose="02020603050405020304" pitchFamily="18" charset="0"/>
+              </a:rPr>
+              <a:t>Evergreen Forest</a:t>
+            </a:r>
+            <a:r>
+              <a:rPr lang="en-US" altLang="zh-CN" sz="1800" dirty="0">
+                <a:solidFill>
+                  <a:srgbClr val="C00000"/>
+                </a:solidFill>
+                <a:effectLst/>
+                <a:latin typeface="Verdana" panose="020B0604030504040204" pitchFamily="34" charset="0"/>
+                <a:ea typeface="SimSun" panose="02010600030101010101" pitchFamily="2" charset="-122"/>
+                <a:cs typeface="Times New Roman" panose="02020603050405020304" pitchFamily="18" charset="0"/>
+              </a:rPr>
+              <a:t>. 2014:</a:t>
+            </a:r>
+            <a:r>
+              <a:rPr lang="en-US" altLang="zh-CN" sz="1800" dirty="0">
+                <a:solidFill>
+                  <a:srgbClr val="C00000"/>
+                </a:solidFill>
+                <a:effectLst/>
+                <a:latin typeface="Verdana" panose="020B0604030504040204" pitchFamily="34" charset="0"/>
+                <a:ea typeface="Times New Roman" panose="02020603050405020304" pitchFamily="18" charset="0"/>
+                <a:cs typeface="Times New Roman" panose="02020603050405020304" pitchFamily="18" charset="0"/>
+              </a:rPr>
+              <a:t>Evergreen Forest</a:t>
+            </a:r>
+            <a:endParaRPr lang="zh-CN" altLang="zh-CN" sz="1800" dirty="0">
+              <a:solidFill>
+                <a:srgbClr val="C00000"/>
+              </a:solidFill>
+              <a:effectLst/>
+              <a:latin typeface="Verdana" panose="020B0604030504040204" pitchFamily="34" charset="0"/>
+              <a:ea typeface="Times New Roman" panose="02020603050405020304" pitchFamily="18" charset="0"/>
+              <a:cs typeface="Times New Roman" panose="02020603050405020304" pitchFamily="18" charset="0"/>
+            </a:endParaRPr>
+          </a:p>
+        </p:txBody>
+      </p:sp>
     </p:spTree>
     <p:extLst>
       <p:ext uri="{BB962C8B-B14F-4D97-AF65-F5344CB8AC3E}">
-        <p14:creationId xmlns:p14="http://schemas.microsoft.com/office/powerpoint/2010/main" val="1728764899"/>
+        <p14:creationId xmlns:p14="http://schemas.microsoft.com/office/powerpoint/2010/main" val="4271970210"/>
       </p:ext>
     </p:extLst>
   </p:cSld>
@@ -3459,48 +3576,58 @@
       </p:grpSpPr>
       <p:sp>
         <p:nvSpPr>
-          <p:cNvPr id="2" name="Title 1">
-            <a:extLst>
-              <a:ext uri="{FF2B5EF4-FFF2-40B4-BE49-F238E27FC236}">
-                <a16:creationId xmlns:a16="http://schemas.microsoft.com/office/drawing/2014/main" id="{6B99E9E2-D36A-64D4-EA0D-4B1FF40EE3F0}"/>
-              </a:ext>
-            </a:extLst>
-          </p:cNvPr>
-          <p:cNvSpPr>
-            <a:spLocks noGrp="1"/>
-          </p:cNvSpPr>
-          <p:nvPr>
-            <p:ph type="title"/>
-          </p:nvPr>
-        </p:nvSpPr>
-        <p:spPr/>
-        <p:txBody>
-          <a:bodyPr/>
-          <a:lstStyle/>
-          <a:p>
+          <p:cNvPr id="3" name="Content Placeholder 2">
+            <a:extLst>
+              <a:ext uri="{FF2B5EF4-FFF2-40B4-BE49-F238E27FC236}">
+                <a16:creationId xmlns:a16="http://schemas.microsoft.com/office/drawing/2014/main" id="{973D12C3-0388-41D0-BE48-CF8E9A5D81A6}"/>
+              </a:ext>
+            </a:extLst>
+          </p:cNvPr>
+          <p:cNvSpPr>
+            <a:spLocks noGrp="1"/>
+          </p:cNvSpPr>
+          <p:nvPr>
+            <p:ph idx="1"/>
+          </p:nvPr>
+        </p:nvSpPr>
+        <p:spPr>
+          <a:xfrm>
+            <a:off x="838199" y="344297"/>
+            <a:ext cx="10515600" cy="984062"/>
+          </a:xfrm>
+        </p:spPr>
+        <p:txBody>
+          <a:bodyPr/>
+          <a:lstStyle/>
+          <a:p>
+            <a:r>
+              <a:rPr lang="en-US" altLang="zh-CN" b="1" dirty="0"/>
+              <a:t>Question 4.</a:t>
+            </a:r>
             <a:r>
               <a:rPr lang="en-US" altLang="zh-CN" dirty="0"/>
-              <a:t>Lab 04</a:t>
-            </a:r>
+              <a:t> Which value was dominant in the change map? (2 Points) </a:t>
+            </a:r>
+            <a:endParaRPr lang="zh-CN" altLang="zh-CN" dirty="0"/>
+          </a:p>
+          <a:p>
             <a:endParaRPr lang="zh-CN" altLang="en-US" dirty="0"/>
           </a:p>
         </p:txBody>
       </p:sp>
       <p:pic>
         <p:nvPicPr>
-          <p:cNvPr id="5" name="Content Placeholder 4">
-            <a:extLst>
-              <a:ext uri="{FF2B5EF4-FFF2-40B4-BE49-F238E27FC236}">
-                <a16:creationId xmlns:a16="http://schemas.microsoft.com/office/drawing/2014/main" id="{39634A23-2957-92BB-5FD1-ADBE29286297}"/>
+          <p:cNvPr id="5" name="Picture 4">
+            <a:extLst>
+              <a:ext uri="{FF2B5EF4-FFF2-40B4-BE49-F238E27FC236}">
+                <a16:creationId xmlns:a16="http://schemas.microsoft.com/office/drawing/2014/main" id="{9985E8EF-22C0-ACC1-473C-03FB6C5A19D1}"/>
               </a:ext>
             </a:extLst>
           </p:cNvPr>
           <p:cNvPicPr>
-            <a:picLocks noGrp="1" noChangeAspect="1"/>
+            <a:picLocks noChangeAspect="1"/>
           </p:cNvPicPr>
-          <p:nvPr>
-            <p:ph idx="1"/>
-          </p:nvPr>
+          <p:nvPr/>
         </p:nvPicPr>
         <p:blipFill>
           <a:blip r:embed="rId2"/>
@@ -3510,60 +3637,30 @@
         </p:blipFill>
         <p:spPr>
           <a:xfrm>
-            <a:off x="693821" y="1350713"/>
-            <a:ext cx="10515600" cy="815788"/>
+            <a:off x="5298711" y="1886143"/>
+            <a:ext cx="5361905" cy="3085714"/>
           </a:xfrm>
           <a:prstGeom prst="rect">
             <a:avLst/>
           </a:prstGeom>
         </p:spPr>
       </p:pic>
-      <p:pic>
-        <p:nvPicPr>
-          <p:cNvPr id="7" name="Picture 6">
-            <a:extLst>
-              <a:ext uri="{FF2B5EF4-FFF2-40B4-BE49-F238E27FC236}">
-                <a16:creationId xmlns:a16="http://schemas.microsoft.com/office/drawing/2014/main" id="{EB1D6F33-DC48-CC35-6101-A54B2F7E619E}"/>
-              </a:ext>
-            </a:extLst>
-          </p:cNvPr>
-          <p:cNvPicPr>
-            <a:picLocks noChangeAspect="1"/>
-          </p:cNvPicPr>
+      <p:sp>
+        <p:nvSpPr>
+          <p:cNvPr id="6" name="TextBox 5">
+            <a:extLst>
+              <a:ext uri="{FF2B5EF4-FFF2-40B4-BE49-F238E27FC236}">
+                <a16:creationId xmlns:a16="http://schemas.microsoft.com/office/drawing/2014/main" id="{CBE8FCBD-5CDB-14E0-A232-8388C9CE4CF9}"/>
+              </a:ext>
+            </a:extLst>
+          </p:cNvPr>
+          <p:cNvSpPr txBox="1"/>
           <p:nvPr/>
-        </p:nvPicPr>
-        <p:blipFill>
-          <a:blip r:embed="rId3"/>
-          <a:stretch>
-            <a:fillRect/>
-          </a:stretch>
-        </p:blipFill>
+        </p:nvSpPr>
         <p:spPr>
           <a:xfrm>
-            <a:off x="7310600" y="2676276"/>
-            <a:ext cx="2600000" cy="3628571"/>
-          </a:xfrm>
-          <a:prstGeom prst="rect">
-            <a:avLst/>
-          </a:prstGeom>
-        </p:spPr>
-      </p:pic>
-      <p:sp>
-        <p:nvSpPr>
-          <p:cNvPr id="9" name="TextBox 8">
-            <a:extLst>
-              <a:ext uri="{FF2B5EF4-FFF2-40B4-BE49-F238E27FC236}">
-                <a16:creationId xmlns:a16="http://schemas.microsoft.com/office/drawing/2014/main" id="{82533DFF-594F-F4A9-706B-B388009F4136}"/>
-              </a:ext>
-            </a:extLst>
-          </p:cNvPr>
-          <p:cNvSpPr txBox="1"/>
-          <p:nvPr/>
-        </p:nvSpPr>
-        <p:spPr>
-          <a:xfrm>
-            <a:off x="916686" y="2676276"/>
-            <a:ext cx="6094476" cy="646331"/>
+            <a:off x="624078" y="2164212"/>
+            <a:ext cx="4094226" cy="369332"/>
           </a:xfrm>
           <a:prstGeom prst="rect">
             <a:avLst/>
@@ -3588,55 +3685,7 @@
                 <a:ea typeface="SimSun" panose="02010600030101010101" pitchFamily="2" charset="-122"/>
                 <a:cs typeface="Times New Roman" panose="02020603050405020304" pitchFamily="18" charset="0"/>
               </a:rPr>
-              <a:t>Answer: </a:t>
-            </a:r>
-            <a:r>
-              <a:rPr lang="en-US" altLang="zh-CN" sz="1800" dirty="0">
-                <a:solidFill>
-                  <a:srgbClr val="C00000"/>
-                </a:solidFill>
-                <a:effectLst/>
-                <a:latin typeface="Verdana" panose="020B0604030504040204" pitchFamily="34" charset="0"/>
-                <a:ea typeface="SimSun" panose="02010600030101010101" pitchFamily="2" charset="-122"/>
-                <a:cs typeface="Times New Roman" panose="02020603050405020304" pitchFamily="18" charset="0"/>
-              </a:rPr>
-              <a:t>1984: </a:t>
-            </a:r>
-            <a:r>
-              <a:rPr lang="en-US" altLang="zh-CN" sz="1800" dirty="0">
-                <a:solidFill>
-                  <a:srgbClr val="C00000"/>
-                </a:solidFill>
-                <a:effectLst/>
-                <a:latin typeface="Verdana" panose="020B0604030504040204" pitchFamily="34" charset="0"/>
-                <a:ea typeface="Times New Roman" panose="02020603050405020304" pitchFamily="18" charset="0"/>
-                <a:cs typeface="Times New Roman" panose="02020603050405020304" pitchFamily="18" charset="0"/>
-              </a:rPr>
-              <a:t>Evergreen Forest</a:t>
-            </a:r>
-            <a:r>
-              <a:rPr lang="en-US" altLang="zh-CN" sz="1800" dirty="0">
-                <a:solidFill>
-                  <a:srgbClr val="C00000"/>
-                </a:solidFill>
-                <a:effectLst/>
-                <a:latin typeface="Verdana" panose="020B0604030504040204" pitchFamily="34" charset="0"/>
-                <a:ea typeface="SimSun" panose="02010600030101010101" pitchFamily="2" charset="-122"/>
-                <a:cs typeface="Times New Roman" panose="02020603050405020304" pitchFamily="18" charset="0"/>
-              </a:rPr>
-              <a:t>. 2014:</a:t>
-            </a:r>
-            <a:r>
-              <a:rPr lang="en-US" altLang="zh-CN" sz="1800" dirty="0">
-                <a:solidFill>
-                  <a:srgbClr val="C00000"/>
-                </a:solidFill>
-                <a:effectLst/>
-                <a:latin typeface="Verdana" panose="020B0604030504040204" pitchFamily="34" charset="0"/>
-                <a:ea typeface="Times New Roman" panose="02020603050405020304" pitchFamily="18" charset="0"/>
-                <a:cs typeface="Times New Roman" panose="02020603050405020304" pitchFamily="18" charset="0"/>
-              </a:rPr>
-              <a:t>Evergreen Forest</a:t>
+              <a:t>Answer: 0, no change</a:t>
             </a:r>
             <a:endParaRPr lang="zh-CN" altLang="zh-CN" sz="1800" dirty="0">
               <a:solidFill>
@@ -3653,7 +3702,7 @@
     </p:spTree>
     <p:extLst>
       <p:ext uri="{BB962C8B-B14F-4D97-AF65-F5344CB8AC3E}">
-        <p14:creationId xmlns:p14="http://schemas.microsoft.com/office/powerpoint/2010/main" val="4271970210"/>
+        <p14:creationId xmlns:p14="http://schemas.microsoft.com/office/powerpoint/2010/main" val="292544502"/>
       </p:ext>
     </p:extLst>
   </p:cSld>
@@ -3680,60 +3729,21 @@
           <a:chExt cx="0" cy="0"/>
         </a:xfrm>
       </p:grpSpPr>
-      <p:sp>
-        <p:nvSpPr>
-          <p:cNvPr id="3" name="Content Placeholder 2">
-            <a:extLst>
-              <a:ext uri="{FF2B5EF4-FFF2-40B4-BE49-F238E27FC236}">
-                <a16:creationId xmlns:a16="http://schemas.microsoft.com/office/drawing/2014/main" id="{973D12C3-0388-41D0-BE48-CF8E9A5D81A6}"/>
-              </a:ext>
-            </a:extLst>
-          </p:cNvPr>
-          <p:cNvSpPr>
-            <a:spLocks noGrp="1"/>
-          </p:cNvSpPr>
-          <p:nvPr>
-            <p:ph idx="1"/>
-          </p:nvPr>
-        </p:nvSpPr>
-        <p:spPr>
-          <a:xfrm>
-            <a:off x="838199" y="344297"/>
-            <a:ext cx="10515600" cy="984062"/>
-          </a:xfrm>
-        </p:spPr>
-        <p:txBody>
-          <a:bodyPr/>
-          <a:lstStyle/>
-          <a:p>
-            <a:r>
-              <a:rPr lang="en-US" altLang="zh-CN" b="1" dirty="0"/>
-              <a:t>Question 4.</a:t>
-            </a:r>
-            <a:r>
-              <a:rPr lang="en-US" altLang="zh-CN" dirty="0"/>
-              <a:t> Which value was dominant in the change map? (2 Points) </a:t>
-            </a:r>
-            <a:endParaRPr lang="zh-CN" altLang="zh-CN" dirty="0"/>
-          </a:p>
-          <a:p>
-            <a:endParaRPr lang="zh-CN" altLang="en-US" dirty="0"/>
-          </a:p>
-        </p:txBody>
-      </p:sp>
       <p:pic>
         <p:nvPicPr>
-          <p:cNvPr id="5" name="Picture 4">
-            <a:extLst>
-              <a:ext uri="{FF2B5EF4-FFF2-40B4-BE49-F238E27FC236}">
-                <a16:creationId xmlns:a16="http://schemas.microsoft.com/office/drawing/2014/main" id="{9985E8EF-22C0-ACC1-473C-03FB6C5A19D1}"/>
+          <p:cNvPr id="5" name="Content Placeholder 4">
+            <a:extLst>
+              <a:ext uri="{FF2B5EF4-FFF2-40B4-BE49-F238E27FC236}">
+                <a16:creationId xmlns:a16="http://schemas.microsoft.com/office/drawing/2014/main" id="{5FD9E542-55DD-F0E5-1C0A-22BDE1866F6E}"/>
               </a:ext>
             </a:extLst>
           </p:cNvPr>
           <p:cNvPicPr>
-            <a:picLocks noChangeAspect="1"/>
+            <a:picLocks noGrp="1" noChangeAspect="1"/>
           </p:cNvPicPr>
-          <p:nvPr/>
+          <p:nvPr>
+            <p:ph idx="1"/>
+          </p:nvPr>
         </p:nvPicPr>
         <p:blipFill>
           <a:blip r:embed="rId2"/>
@@ -3743,8 +3753,8 @@
         </p:blipFill>
         <p:spPr>
           <a:xfrm>
-            <a:off x="5298711" y="1886143"/>
-            <a:ext cx="5361905" cy="3085714"/>
+            <a:off x="512072" y="1910253"/>
+            <a:ext cx="11387311" cy="3037493"/>
           </a:xfrm>
           <a:prstGeom prst="rect">
             <a:avLst/>
@@ -3753,10 +3763,10 @@
       </p:pic>
       <p:sp>
         <p:nvSpPr>
-          <p:cNvPr id="6" name="TextBox 5">
-            <a:extLst>
-              <a:ext uri="{FF2B5EF4-FFF2-40B4-BE49-F238E27FC236}">
-                <a16:creationId xmlns:a16="http://schemas.microsoft.com/office/drawing/2014/main" id="{CBE8FCBD-5CDB-14E0-A232-8388C9CE4CF9}"/>
+          <p:cNvPr id="7" name="TextBox 6">
+            <a:extLst>
+              <a:ext uri="{FF2B5EF4-FFF2-40B4-BE49-F238E27FC236}">
+                <a16:creationId xmlns:a16="http://schemas.microsoft.com/office/drawing/2014/main" id="{0C828C1B-47AA-C631-222A-4CABF5C90946}"/>
               </a:ext>
             </a:extLst>
           </p:cNvPr>
@@ -3765,8 +3775,8 @@
         </p:nvSpPr>
         <p:spPr>
           <a:xfrm>
-            <a:off x="624078" y="2164212"/>
-            <a:ext cx="4094226" cy="369332"/>
+            <a:off x="402345" y="403602"/>
+            <a:ext cx="11387310" cy="923330"/>
           </a:xfrm>
           <a:prstGeom prst="rect">
             <a:avLst/>
@@ -3779,28 +3789,45 @@
           </a:bodyPr>
           <a:lstStyle/>
           <a:p>
-            <a:pPr>
-              <a:buNone/>
-            </a:pPr>
+            <a:r>
+              <a:rPr lang="zh-CN" altLang="zh-CN" dirty="0">
+                <a:solidFill>
+                  <a:srgbClr val="000000"/>
+                </a:solidFill>
+                <a:effectLst/>
+                <a:latin typeface="Calibri" panose="020F0502020204030204" pitchFamily="34" charset="0"/>
+                <a:ea typeface="Times New Roman" panose="02020603050405020304" pitchFamily="18" charset="0"/>
+                <a:cs typeface="Calibri" panose="020F0502020204030204" pitchFamily="34" charset="0"/>
+              </a:rPr>
+              <a:t> </a:t>
+            </a:r>
             <a:r>
               <a:rPr lang="en-US" altLang="zh-CN" dirty="0">
                 <a:solidFill>
-                  <a:srgbClr val="C00000"/>
+                  <a:srgbClr val="000000"/>
                 </a:solidFill>
-                <a:latin typeface="Verdana" panose="020B0604030504040204" pitchFamily="34" charset="0"/>
-                <a:ea typeface="SimSun" panose="02010600030101010101" pitchFamily="2" charset="-122"/>
-                <a:cs typeface="Times New Roman" panose="02020603050405020304" pitchFamily="18" charset="0"/>
+                <a:effectLst/>
+                <a:latin typeface="Calibri" panose="020F0502020204030204" pitchFamily="34" charset="0"/>
+                <a:ea typeface="Times New Roman" panose="02020603050405020304" pitchFamily="18" charset="0"/>
+                <a:cs typeface="Calibri" panose="020F0502020204030204" pitchFamily="34" charset="0"/>
               </a:rPr>
-              <a:t>Answer: 0, no change</a:t>
-            </a:r>
-            <a:endParaRPr lang="zh-CN" altLang="zh-CN" sz="1800" dirty="0">
-              <a:solidFill>
-                <a:srgbClr val="C00000"/>
-              </a:solidFill>
-              <a:effectLst/>
-              <a:latin typeface="Verdana" panose="020B0604030504040204" pitchFamily="34" charset="0"/>
-              <a:ea typeface="Times New Roman" panose="02020603050405020304" pitchFamily="18" charset="0"/>
-              <a:cs typeface="Times New Roman" panose="02020603050405020304" pitchFamily="18" charset="0"/>
+              <a:t>Q7: </a:t>
+            </a:r>
+            <a:r>
+              <a:rPr lang="en-US" altLang="zh-CN" dirty="0">
+                <a:solidFill>
+                  <a:srgbClr val="000000"/>
+                </a:solidFill>
+                <a:effectLst/>
+                <a:latin typeface="Calibri" panose="020F0502020204030204" pitchFamily="34" charset="0"/>
+                <a:ea typeface="Calibri" panose="020F0502020204030204" pitchFamily="34" charset="0"/>
+                <a:cs typeface="Calibri" panose="020F0502020204030204" pitchFamily="34" charset="0"/>
+              </a:rPr>
+              <a:t>Excepting pixels with no change, which transition was dominant? How much land experienced such a transition? Please give the class name, not the place-holders. (4 Points) (Hint, you can sort the table by right-clicking on the column, followed by Sort Descending or Sort Ascending; you can find the transitions in CLASS_NAME field and area in AREA field)</a:t>
+            </a:r>
+            <a:endParaRPr lang="zh-CN" altLang="en-US" dirty="0">
+              <a:latin typeface="Calibri" panose="020F0502020204030204" pitchFamily="34" charset="0"/>
+              <a:cs typeface="Calibri" panose="020F0502020204030204" pitchFamily="34" charset="0"/>
             </a:endParaRPr>
           </a:p>
         </p:txBody>
@@ -3808,7 +3835,7 @@
     </p:spTree>
     <p:extLst>
       <p:ext uri="{BB962C8B-B14F-4D97-AF65-F5344CB8AC3E}">
-        <p14:creationId xmlns:p14="http://schemas.microsoft.com/office/powerpoint/2010/main" val="292544502"/>
+        <p14:creationId xmlns:p14="http://schemas.microsoft.com/office/powerpoint/2010/main" val="3852111789"/>
       </p:ext>
     </p:extLst>
   </p:cSld>
@@ -3835,21 +3862,60 @@
           <a:chExt cx="0" cy="0"/>
         </a:xfrm>
       </p:grpSpPr>
+      <p:sp>
+        <p:nvSpPr>
+          <p:cNvPr id="3" name="Content Placeholder 2">
+            <a:extLst>
+              <a:ext uri="{FF2B5EF4-FFF2-40B4-BE49-F238E27FC236}">
+                <a16:creationId xmlns:a16="http://schemas.microsoft.com/office/drawing/2014/main" id="{CEB97702-121C-D17D-AE08-C35B9209676D}"/>
+              </a:ext>
+            </a:extLst>
+          </p:cNvPr>
+          <p:cNvSpPr>
+            <a:spLocks noGrp="1"/>
+          </p:cNvSpPr>
+          <p:nvPr>
+            <p:ph idx="1"/>
+          </p:nvPr>
+        </p:nvSpPr>
+        <p:spPr>
+          <a:xfrm>
+            <a:off x="838200" y="439587"/>
+            <a:ext cx="10515600" cy="956076"/>
+          </a:xfrm>
+        </p:spPr>
+        <p:txBody>
+          <a:bodyPr/>
+          <a:lstStyle/>
+          <a:p>
+            <a:r>
+              <a:rPr lang="en-US" altLang="zh-CN" b="1" dirty="0"/>
+              <a:t>Question 10.</a:t>
+            </a:r>
+            <a:r>
+              <a:rPr lang="en-US" altLang="zh-CN" dirty="0"/>
+              <a:t> How much land changed from Shallows/Littoral (9) to Bog (8)? (2 Points)</a:t>
+            </a:r>
+            <a:endParaRPr lang="zh-CN" altLang="zh-CN" dirty="0"/>
+          </a:p>
+          <a:p>
+            <a:endParaRPr lang="zh-CN" altLang="en-US" dirty="0"/>
+          </a:p>
+        </p:txBody>
+      </p:sp>
       <p:pic>
         <p:nvPicPr>
-          <p:cNvPr id="5" name="Content Placeholder 4">
-            <a:extLst>
-              <a:ext uri="{FF2B5EF4-FFF2-40B4-BE49-F238E27FC236}">
-                <a16:creationId xmlns:a16="http://schemas.microsoft.com/office/drawing/2014/main" id="{5FD9E542-55DD-F0E5-1C0A-22BDE1866F6E}"/>
+          <p:cNvPr id="5" name="Picture 4">
+            <a:extLst>
+              <a:ext uri="{FF2B5EF4-FFF2-40B4-BE49-F238E27FC236}">
+                <a16:creationId xmlns:a16="http://schemas.microsoft.com/office/drawing/2014/main" id="{75F82F5C-57D0-7005-F473-F73D9D6D9D6E}"/>
               </a:ext>
             </a:extLst>
           </p:cNvPr>
           <p:cNvPicPr>
-            <a:picLocks noGrp="1" noChangeAspect="1"/>
+            <a:picLocks noChangeAspect="1"/>
           </p:cNvPicPr>
-          <p:nvPr>
-            <p:ph idx="1"/>
-          </p:nvPr>
+          <p:nvPr/>
         </p:nvPicPr>
         <p:blipFill>
           <a:blip r:embed="rId2"/>
@@ -3859,8 +3925,8 @@
         </p:blipFill>
         <p:spPr>
           <a:xfrm>
-            <a:off x="512072" y="1910253"/>
-            <a:ext cx="11387311" cy="3037493"/>
+            <a:off x="1159386" y="1665172"/>
+            <a:ext cx="10467909" cy="3703270"/>
           </a:xfrm>
           <a:prstGeom prst="rect">
             <a:avLst/>
@@ -3872,7 +3938,7 @@
           <p:cNvPr id="7" name="TextBox 6">
             <a:extLst>
               <a:ext uri="{FF2B5EF4-FFF2-40B4-BE49-F238E27FC236}">
-                <a16:creationId xmlns:a16="http://schemas.microsoft.com/office/drawing/2014/main" id="{0C828C1B-47AA-C631-222A-4CABF5C90946}"/>
+                <a16:creationId xmlns:a16="http://schemas.microsoft.com/office/drawing/2014/main" id="{B57B0BB2-C048-802A-1381-EF061A1A0737}"/>
               </a:ext>
             </a:extLst>
           </p:cNvPr>
@@ -3881,8 +3947,8 @@
         </p:nvSpPr>
         <p:spPr>
           <a:xfrm>
-            <a:off x="402345" y="403602"/>
-            <a:ext cx="11387310" cy="923330"/>
+            <a:off x="1159386" y="5458968"/>
+            <a:ext cx="1993392" cy="646331"/>
           </a:xfrm>
           <a:prstGeom prst="rect">
             <a:avLst/>
@@ -3890,50 +3956,33 @@
           <a:noFill/>
         </p:spPr>
         <p:txBody>
-          <a:bodyPr wrap="square">
+          <a:bodyPr wrap="square" rtlCol="0">
             <a:spAutoFit/>
           </a:bodyPr>
           <a:lstStyle/>
           <a:p>
             <a:r>
-              <a:rPr lang="zh-CN" altLang="zh-CN" dirty="0">
+              <a:rPr lang="en-US" altLang="zh-CN" b="1" dirty="0">
                 <a:solidFill>
-                  <a:srgbClr val="000000"/>
+                  <a:srgbClr val="FF0000"/>
                 </a:solidFill>
-                <a:effectLst/>
-                <a:latin typeface="Calibri" panose="020F0502020204030204" pitchFamily="34" charset="0"/>
-                <a:ea typeface="Times New Roman" panose="02020603050405020304" pitchFamily="18" charset="0"/>
-                <a:cs typeface="Calibri" panose="020F0502020204030204" pitchFamily="34" charset="0"/>
               </a:rPr>
-              <a:t> </a:t>
-            </a:r>
-            <a:r>
-              <a:rPr lang="en-US" altLang="zh-CN" dirty="0">
+              <a:t>Row is 1984</a:t>
+            </a:r>
+          </a:p>
+          <a:p>
+            <a:r>
+              <a:rPr lang="en-US" altLang="zh-CN" b="1" dirty="0">
                 <a:solidFill>
-                  <a:srgbClr val="000000"/>
+                  <a:srgbClr val="FF0000"/>
                 </a:solidFill>
-                <a:effectLst/>
-                <a:latin typeface="Calibri" panose="020F0502020204030204" pitchFamily="34" charset="0"/>
-                <a:ea typeface="Times New Roman" panose="02020603050405020304" pitchFamily="18" charset="0"/>
-                <a:cs typeface="Calibri" panose="020F0502020204030204" pitchFamily="34" charset="0"/>
               </a:rPr>
-              <a:t>Q7: </a:t>
-            </a:r>
-            <a:r>
-              <a:rPr lang="en-US" altLang="zh-CN" dirty="0">
-                <a:solidFill>
-                  <a:srgbClr val="000000"/>
-                </a:solidFill>
-                <a:effectLst/>
-                <a:latin typeface="Calibri" panose="020F0502020204030204" pitchFamily="34" charset="0"/>
-                <a:ea typeface="Calibri" panose="020F0502020204030204" pitchFamily="34" charset="0"/>
-                <a:cs typeface="Calibri" panose="020F0502020204030204" pitchFamily="34" charset="0"/>
-              </a:rPr>
-              <a:t>Excepting pixels with no change, which transition was dominant? How much land experienced such a transition? Please give the class name, not the place-holders. (4 Points) (Hint, you can sort the table by right-clicking on the column, followed by Sort Descending or Sort Ascending; you can find the transitions in CLASS_NAME field and area in AREA field)</a:t>
-            </a:r>
-            <a:endParaRPr lang="zh-CN" altLang="en-US" dirty="0">
-              <a:latin typeface="Calibri" panose="020F0502020204030204" pitchFamily="34" charset="0"/>
-              <a:cs typeface="Calibri" panose="020F0502020204030204" pitchFamily="34" charset="0"/>
+              <a:t>Column is 2014</a:t>
+            </a:r>
+            <a:endParaRPr lang="zh-CN" altLang="en-US" b="1" dirty="0">
+              <a:solidFill>
+                <a:srgbClr val="FF0000"/>
+              </a:solidFill>
             </a:endParaRPr>
           </a:p>
         </p:txBody>
@@ -3941,7 +3990,7 @@
     </p:spTree>
     <p:extLst>
       <p:ext uri="{BB962C8B-B14F-4D97-AF65-F5344CB8AC3E}">
-        <p14:creationId xmlns:p14="http://schemas.microsoft.com/office/powerpoint/2010/main" val="3852111789"/>
+        <p14:creationId xmlns:p14="http://schemas.microsoft.com/office/powerpoint/2010/main" val="4247602336"/>
       </p:ext>
     </p:extLst>
   </p:cSld>
@@ -3973,7 +4022,7 @@
           <p:cNvPr id="3" name="Content Placeholder 2">
             <a:extLst>
               <a:ext uri="{FF2B5EF4-FFF2-40B4-BE49-F238E27FC236}">
-                <a16:creationId xmlns:a16="http://schemas.microsoft.com/office/drawing/2014/main" id="{CEB97702-121C-D17D-AE08-C35B9209676D}"/>
+                <a16:creationId xmlns:a16="http://schemas.microsoft.com/office/drawing/2014/main" id="{294D9330-4758-7E76-2C98-E71704FBD8DC}"/>
               </a:ext>
             </a:extLst>
           </p:cNvPr>
@@ -3986,8 +4035,8 @@
         </p:nvSpPr>
         <p:spPr>
           <a:xfrm>
-            <a:off x="838200" y="439587"/>
-            <a:ext cx="10515600" cy="956076"/>
+            <a:off x="947928" y="170561"/>
+            <a:ext cx="10515600" cy="542671"/>
           </a:xfrm>
         </p:spPr>
         <p:txBody>
@@ -3995,26 +4044,19 @@
           <a:lstStyle/>
           <a:p>
             <a:r>
-              <a:rPr lang="en-US" altLang="zh-CN" b="1" dirty="0"/>
-              <a:t>Question 10.</a:t>
-            </a:r>
-            <a:r>
               <a:rPr lang="en-US" altLang="zh-CN" dirty="0"/>
-              <a:t> How much land changed from Shallows/Littoral (9) to Bog (8)? (2 Points)</a:t>
-            </a:r>
-            <a:endParaRPr lang="zh-CN" altLang="zh-CN" dirty="0"/>
-          </a:p>
-          <a:p>
+              <a:t>Lab 03</a:t>
+            </a:r>
             <a:endParaRPr lang="zh-CN" altLang="en-US" dirty="0"/>
           </a:p>
         </p:txBody>
       </p:sp>
       <p:pic>
         <p:nvPicPr>
-          <p:cNvPr id="5" name="Picture 4">
-            <a:extLst>
-              <a:ext uri="{FF2B5EF4-FFF2-40B4-BE49-F238E27FC236}">
-                <a16:creationId xmlns:a16="http://schemas.microsoft.com/office/drawing/2014/main" id="{75F82F5C-57D0-7005-F473-F73D9D6D9D6E}"/>
+          <p:cNvPr id="4" name="Picture 3">
+            <a:extLst>
+              <a:ext uri="{FF2B5EF4-FFF2-40B4-BE49-F238E27FC236}">
+                <a16:creationId xmlns:a16="http://schemas.microsoft.com/office/drawing/2014/main" id="{F7CDFFB3-CA42-E2C2-38F5-486A160F5657}"/>
               </a:ext>
             </a:extLst>
           </p:cNvPr>
@@ -4031,155 +4073,7 @@
         </p:blipFill>
         <p:spPr>
           <a:xfrm>
-            <a:off x="1159386" y="1665172"/>
-            <a:ext cx="10467909" cy="3703270"/>
-          </a:xfrm>
-          <a:prstGeom prst="rect">
-            <a:avLst/>
-          </a:prstGeom>
-        </p:spPr>
-      </p:pic>
-      <p:sp>
-        <p:nvSpPr>
-          <p:cNvPr id="7" name="TextBox 6">
-            <a:extLst>
-              <a:ext uri="{FF2B5EF4-FFF2-40B4-BE49-F238E27FC236}">
-                <a16:creationId xmlns:a16="http://schemas.microsoft.com/office/drawing/2014/main" id="{B57B0BB2-C048-802A-1381-EF061A1A0737}"/>
-              </a:ext>
-            </a:extLst>
-          </p:cNvPr>
-          <p:cNvSpPr txBox="1"/>
-          <p:nvPr/>
-        </p:nvSpPr>
-        <p:spPr>
-          <a:xfrm>
-            <a:off x="1159386" y="5458968"/>
-            <a:ext cx="1993392" cy="646331"/>
-          </a:xfrm>
-          <a:prstGeom prst="rect">
-            <a:avLst/>
-          </a:prstGeom>
-          <a:noFill/>
-        </p:spPr>
-        <p:txBody>
-          <a:bodyPr wrap="square" rtlCol="0">
-            <a:spAutoFit/>
-          </a:bodyPr>
-          <a:lstStyle/>
-          <a:p>
-            <a:r>
-              <a:rPr lang="en-US" altLang="zh-CN" b="1" dirty="0">
-                <a:solidFill>
-                  <a:srgbClr val="FF0000"/>
-                </a:solidFill>
-              </a:rPr>
-              <a:t>Row is 1984</a:t>
-            </a:r>
-          </a:p>
-          <a:p>
-            <a:r>
-              <a:rPr lang="en-US" altLang="zh-CN" b="1" dirty="0">
-                <a:solidFill>
-                  <a:srgbClr val="FF0000"/>
-                </a:solidFill>
-              </a:rPr>
-              <a:t>Column is 2014</a:t>
-            </a:r>
-            <a:endParaRPr lang="zh-CN" altLang="en-US" b="1" dirty="0">
-              <a:solidFill>
-                <a:srgbClr val="FF0000"/>
-              </a:solidFill>
-            </a:endParaRPr>
-          </a:p>
-        </p:txBody>
-      </p:sp>
-    </p:spTree>
-    <p:extLst>
-      <p:ext uri="{BB962C8B-B14F-4D97-AF65-F5344CB8AC3E}">
-        <p14:creationId xmlns:p14="http://schemas.microsoft.com/office/powerpoint/2010/main" val="4247602336"/>
-      </p:ext>
-    </p:extLst>
-  </p:cSld>
-  <p:clrMapOvr>
-    <a:masterClrMapping/>
-  </p:clrMapOvr>
-</p:sld>
-</file>
-
-<file path=ppt/slides/slide6.xml><?xml version="1.0" encoding="utf-8"?>
-<p:sld xmlns:a="http://schemas.openxmlformats.org/drawingml/2006/main" xmlns:r="http://schemas.openxmlformats.org/officeDocument/2006/relationships" xmlns:p="http://schemas.openxmlformats.org/presentationml/2006/main">
-  <p:cSld>
-    <p:spTree>
-      <p:nvGrpSpPr>
-        <p:cNvPr id="1" name=""/>
-        <p:cNvGrpSpPr/>
-        <p:nvPr/>
-      </p:nvGrpSpPr>
-      <p:grpSpPr>
-        <a:xfrm>
-          <a:off x="0" y="0"/>
-          <a:ext cx="0" cy="0"/>
-          <a:chOff x="0" y="0"/>
-          <a:chExt cx="0" cy="0"/>
-        </a:xfrm>
-      </p:grpSpPr>
-      <p:sp>
-        <p:nvSpPr>
-          <p:cNvPr id="3" name="Content Placeholder 2">
-            <a:extLst>
-              <a:ext uri="{FF2B5EF4-FFF2-40B4-BE49-F238E27FC236}">
-                <a16:creationId xmlns:a16="http://schemas.microsoft.com/office/drawing/2014/main" id="{294D9330-4758-7E76-2C98-E71704FBD8DC}"/>
-              </a:ext>
-            </a:extLst>
-          </p:cNvPr>
-          <p:cNvSpPr>
-            <a:spLocks noGrp="1"/>
-          </p:cNvSpPr>
-          <p:nvPr>
-            <p:ph idx="1"/>
-          </p:nvPr>
-        </p:nvSpPr>
-        <p:spPr>
-          <a:xfrm>
-            <a:off x="947928" y="170561"/>
-            <a:ext cx="10515600" cy="542671"/>
-          </a:xfrm>
-        </p:spPr>
-        <p:txBody>
-          <a:bodyPr/>
-          <a:lstStyle/>
-          <a:p>
-            <a:r>
-              <a:rPr lang="en-US" altLang="zh-CN" dirty="0"/>
-              <a:t>Lab 03</a:t>
-            </a:r>
-            <a:endParaRPr lang="zh-CN" altLang="en-US" dirty="0"/>
-          </a:p>
-        </p:txBody>
-      </p:sp>
-      <p:pic>
-        <p:nvPicPr>
-          <p:cNvPr id="4" name="Picture 3">
-            <a:extLst>
-              <a:ext uri="{FF2B5EF4-FFF2-40B4-BE49-F238E27FC236}">
-                <a16:creationId xmlns:a16="http://schemas.microsoft.com/office/drawing/2014/main" id="{F7CDFFB3-CA42-E2C2-38F5-486A160F5657}"/>
-              </a:ext>
-            </a:extLst>
-          </p:cNvPr>
-          <p:cNvPicPr>
-            <a:picLocks noChangeAspect="1"/>
-          </p:cNvPicPr>
-          <p:nvPr/>
-        </p:nvPicPr>
-        <p:blipFill>
-          <a:blip r:embed="rId2"/>
-          <a:stretch>
-            <a:fillRect/>
-          </a:stretch>
-        </p:blipFill>
-        <p:spPr>
-          <a:xfrm>
-            <a:off x="1279912" y="1820846"/>
+            <a:off x="1389640" y="1585919"/>
             <a:ext cx="10183616" cy="4406700"/>
           </a:xfrm>
           <a:prstGeom prst="rect">
